--- a/docs/images/ColoniesArch.pptx
+++ b/docs/images/ColoniesArch.pptx
@@ -104,6 +104,11 @@
       </a:defRPr>
     </a:lvl9pPr>
   </p:defaultTextStyle>
+  <p:extLst>
+    <p:ext uri="{EFAFB233-063F-42B5-8137-9DF3F51BA10A}">
+      <p15:sldGuideLst xmlns:p15="http://schemas.microsoft.com/office/powerpoint/2012/main"/>
+    </p:ext>
+  </p:extLst>
 </p:presentation>
 </file>
 
@@ -238,7 +243,7 @@
           <a:p>
             <a:fld id="{B79BB705-F904-8E46-BC0B-BBFDED0D0282}" type="datetimeFigureOut">
               <a:rPr lang="en-US" smtClean="0"/>
-              <a:t>12/23/21</a:t>
+              <a:t>4/3/22</a:t>
             </a:fld>
             <a:endParaRPr lang="en-US"/>
           </a:p>
@@ -408,7 +413,7 @@
           <a:p>
             <a:fld id="{B79BB705-F904-8E46-BC0B-BBFDED0D0282}" type="datetimeFigureOut">
               <a:rPr lang="en-US" smtClean="0"/>
-              <a:t>12/23/21</a:t>
+              <a:t>4/3/22</a:t>
             </a:fld>
             <a:endParaRPr lang="en-US"/>
           </a:p>
@@ -588,7 +593,7 @@
           <a:p>
             <a:fld id="{B79BB705-F904-8E46-BC0B-BBFDED0D0282}" type="datetimeFigureOut">
               <a:rPr lang="en-US" smtClean="0"/>
-              <a:t>12/23/21</a:t>
+              <a:t>4/3/22</a:t>
             </a:fld>
             <a:endParaRPr lang="en-US"/>
           </a:p>
@@ -758,7 +763,7 @@
           <a:p>
             <a:fld id="{B79BB705-F904-8E46-BC0B-BBFDED0D0282}" type="datetimeFigureOut">
               <a:rPr lang="en-US" smtClean="0"/>
-              <a:t>12/23/21</a:t>
+              <a:t>4/3/22</a:t>
             </a:fld>
             <a:endParaRPr lang="en-US"/>
           </a:p>
@@ -1002,7 +1007,7 @@
           <a:p>
             <a:fld id="{B79BB705-F904-8E46-BC0B-BBFDED0D0282}" type="datetimeFigureOut">
               <a:rPr lang="en-US" smtClean="0"/>
-              <a:t>12/23/21</a:t>
+              <a:t>4/3/22</a:t>
             </a:fld>
             <a:endParaRPr lang="en-US"/>
           </a:p>
@@ -1234,7 +1239,7 @@
           <a:p>
             <a:fld id="{B79BB705-F904-8E46-BC0B-BBFDED0D0282}" type="datetimeFigureOut">
               <a:rPr lang="en-US" smtClean="0"/>
-              <a:t>12/23/21</a:t>
+              <a:t>4/3/22</a:t>
             </a:fld>
             <a:endParaRPr lang="en-US"/>
           </a:p>
@@ -1601,7 +1606,7 @@
           <a:p>
             <a:fld id="{B79BB705-F904-8E46-BC0B-BBFDED0D0282}" type="datetimeFigureOut">
               <a:rPr lang="en-US" smtClean="0"/>
-              <a:t>12/23/21</a:t>
+              <a:t>4/3/22</a:t>
             </a:fld>
             <a:endParaRPr lang="en-US"/>
           </a:p>
@@ -1719,7 +1724,7 @@
           <a:p>
             <a:fld id="{B79BB705-F904-8E46-BC0B-BBFDED0D0282}" type="datetimeFigureOut">
               <a:rPr lang="en-US" smtClean="0"/>
-              <a:t>12/23/21</a:t>
+              <a:t>4/3/22</a:t>
             </a:fld>
             <a:endParaRPr lang="en-US"/>
           </a:p>
@@ -1814,7 +1819,7 @@
           <a:p>
             <a:fld id="{B79BB705-F904-8E46-BC0B-BBFDED0D0282}" type="datetimeFigureOut">
               <a:rPr lang="en-US" smtClean="0"/>
-              <a:t>12/23/21</a:t>
+              <a:t>4/3/22</a:t>
             </a:fld>
             <a:endParaRPr lang="en-US"/>
           </a:p>
@@ -2091,7 +2096,7 @@
           <a:p>
             <a:fld id="{B79BB705-F904-8E46-BC0B-BBFDED0D0282}" type="datetimeFigureOut">
               <a:rPr lang="en-US" smtClean="0"/>
-              <a:t>12/23/21</a:t>
+              <a:t>4/3/22</a:t>
             </a:fld>
             <a:endParaRPr lang="en-US"/>
           </a:p>
@@ -2348,7 +2353,7 @@
           <a:p>
             <a:fld id="{B79BB705-F904-8E46-BC0B-BBFDED0D0282}" type="datetimeFigureOut">
               <a:rPr lang="en-US" smtClean="0"/>
-              <a:t>12/23/21</a:t>
+              <a:t>4/3/22</a:t>
             </a:fld>
             <a:endParaRPr lang="en-US"/>
           </a:p>
@@ -2561,7 +2566,7 @@
           <a:p>
             <a:fld id="{B79BB705-F904-8E46-BC0B-BBFDED0D0282}" type="datetimeFigureOut">
               <a:rPr lang="en-US" smtClean="0"/>
-              <a:t>12/23/21</a:t>
+              <a:t>4/3/22</a:t>
             </a:fld>
             <a:endParaRPr lang="en-US"/>
           </a:p>
@@ -5670,7 +5675,7 @@
             <a:pPr algn="ctr"/>
             <a:r>
               <a:rPr lang="en-US" sz="1800" dirty="0"/>
-              <a:t>Colony App</a:t>
+              <a:t>Colony Worker</a:t>
             </a:r>
           </a:p>
         </p:txBody>
@@ -5706,7 +5711,7 @@
             <a:pPr algn="ctr"/>
             <a:r>
               <a:rPr lang="en-US" sz="1800" dirty="0"/>
-              <a:t>Colony Service</a:t>
+              <a:t>Colony Worker</a:t>
             </a:r>
           </a:p>
         </p:txBody>
@@ -5742,7 +5747,7 @@
             <a:pPr algn="ctr"/>
             <a:r>
               <a:rPr lang="en-US" sz="1800" dirty="0"/>
-              <a:t>Colony App</a:t>
+              <a:t>Colony Worker</a:t>
             </a:r>
           </a:p>
         </p:txBody>

--- a/docs/images/ColoniesArch.pptx
+++ b/docs/images/ColoniesArch.pptx
@@ -6,6 +6,7 @@
   </p:sldMasterIdLst>
   <p:sldIdLst>
     <p:sldId id="257" r:id="rId2"/>
+    <p:sldId id="258" r:id="rId3"/>
   </p:sldIdLst>
   <p:sldSz cx="12801600" cy="9601200" type="A3"/>
   <p:notesSz cx="6858000" cy="9144000"/>
@@ -3020,7 +3021,9 @@
           <a:lstStyle/>
           <a:p>
             <a:pPr algn="ctr"/>
-            <a:endParaRPr lang="en-US" dirty="0"/>
+            <a:endParaRPr lang="en-US" dirty="0">
+              <a:latin typeface="Titillium Web" pitchFamily="2" charset="77"/>
+            </a:endParaRPr>
           </a:p>
         </p:txBody>
       </p:sp>
@@ -3075,7 +3078,9 @@
           <a:lstStyle/>
           <a:p>
             <a:pPr algn="ctr"/>
-            <a:endParaRPr lang="en-US" sz="1600" dirty="0"/>
+            <a:endParaRPr lang="en-US" sz="1600" dirty="0">
+              <a:latin typeface="Titillium Web" pitchFamily="2" charset="77"/>
+            </a:endParaRPr>
           </a:p>
         </p:txBody>
       </p:sp>
@@ -3129,7 +3134,9 @@
           <a:lstStyle/>
           <a:p>
             <a:pPr algn="ctr"/>
-            <a:endParaRPr lang="en-US" sz="1600" dirty="0"/>
+            <a:endParaRPr lang="en-US" sz="1600" dirty="0">
+              <a:latin typeface="Titillium Web" pitchFamily="2" charset="77"/>
+            </a:endParaRPr>
           </a:p>
         </p:txBody>
       </p:sp>
@@ -3163,7 +3170,9 @@
           <a:p>
             <a:pPr algn="ctr"/>
             <a:r>
-              <a:rPr lang="en-US" sz="1600" dirty="0"/>
+              <a:rPr lang="en-US" sz="1600" dirty="0">
+                <a:latin typeface="Titillium Web" pitchFamily="2" charset="77"/>
+              </a:rPr>
               <a:t>Colonies Server</a:t>
             </a:r>
           </a:p>
@@ -3219,7 +3228,9 @@
           <a:lstStyle/>
           <a:p>
             <a:pPr algn="ctr"/>
-            <a:endParaRPr lang="en-US" sz="1600" dirty="0"/>
+            <a:endParaRPr lang="en-US" sz="1600" dirty="0">
+              <a:latin typeface="Titillium Web" pitchFamily="2" charset="77"/>
+            </a:endParaRPr>
           </a:p>
         </p:txBody>
       </p:sp>
@@ -3252,7 +3263,9 @@
           <a:lstStyle/>
           <a:p>
             <a:r>
-              <a:rPr lang="en-US" sz="1600" dirty="0"/>
+              <a:rPr lang="en-US" sz="1600" dirty="0">
+                <a:latin typeface="Titillium Web" pitchFamily="2" charset="77"/>
+              </a:rPr>
               <a:t>Colony</a:t>
             </a:r>
           </a:p>
@@ -3311,7 +3324,9 @@
           <a:lstStyle/>
           <a:p>
             <a:pPr algn="ctr"/>
-            <a:endParaRPr lang="en-US" sz="1600"/>
+            <a:endParaRPr lang="en-US" sz="1600">
+              <a:latin typeface="Titillium Web" pitchFamily="2" charset="77"/>
+            </a:endParaRPr>
           </a:p>
         </p:txBody>
       </p:sp>
@@ -3368,7 +3383,9 @@
           <a:lstStyle/>
           <a:p>
             <a:pPr algn="ctr"/>
-            <a:endParaRPr lang="en-US" sz="1600"/>
+            <a:endParaRPr lang="en-US" sz="1600">
+              <a:latin typeface="Titillium Web" pitchFamily="2" charset="77"/>
+            </a:endParaRPr>
           </a:p>
         </p:txBody>
       </p:sp>
@@ -3425,7 +3442,9 @@
           <a:lstStyle/>
           <a:p>
             <a:pPr algn="ctr"/>
-            <a:endParaRPr lang="en-US" sz="1600"/>
+            <a:endParaRPr lang="en-US" sz="1600">
+              <a:latin typeface="Titillium Web" pitchFamily="2" charset="77"/>
+            </a:endParaRPr>
           </a:p>
         </p:txBody>
       </p:sp>
@@ -3479,7 +3498,9 @@
           <a:lstStyle/>
           <a:p>
             <a:pPr algn="ctr"/>
-            <a:endParaRPr lang="en-US" sz="1600" dirty="0"/>
+            <a:endParaRPr lang="en-US" sz="1600" dirty="0">
+              <a:latin typeface="Titillium Web" pitchFamily="2" charset="77"/>
+            </a:endParaRPr>
           </a:p>
         </p:txBody>
       </p:sp>
@@ -3576,7 +3597,9 @@
           <a:lstStyle/>
           <a:p>
             <a:pPr algn="ctr"/>
-            <a:endParaRPr lang="en-US" sz="1600" dirty="0"/>
+            <a:endParaRPr lang="en-US" sz="1600" dirty="0">
+              <a:latin typeface="Titillium Web" pitchFamily="2" charset="77"/>
+            </a:endParaRPr>
           </a:p>
         </p:txBody>
       </p:sp>
@@ -3673,7 +3696,9 @@
           <a:lstStyle/>
           <a:p>
             <a:pPr algn="ctr"/>
-            <a:endParaRPr lang="en-US" sz="1600" dirty="0"/>
+            <a:endParaRPr lang="en-US" sz="1600" dirty="0">
+              <a:latin typeface="Titillium Web" pitchFamily="2" charset="77"/>
+            </a:endParaRPr>
           </a:p>
         </p:txBody>
       </p:sp>
@@ -3734,7 +3759,7 @@
         </p:nvSpPr>
         <p:spPr>
           <a:xfrm>
-            <a:off x="6131226" y="4146083"/>
+            <a:off x="6045104" y="4159253"/>
             <a:ext cx="6098058" cy="338554"/>
           </a:xfrm>
           <a:prstGeom prst="rect">
@@ -3749,7 +3774,9 @@
           <a:lstStyle/>
           <a:p>
             <a:r>
-              <a:rPr lang="en-US" sz="1600" dirty="0"/>
+              <a:rPr lang="en-US" sz="1600" dirty="0">
+                <a:latin typeface="Titillium Web" pitchFamily="2" charset="77"/>
+              </a:rPr>
               <a:t>Internet</a:t>
             </a:r>
           </a:p>
@@ -3807,7 +3834,9 @@
           <a:p>
             <a:pPr algn="ctr"/>
             <a:r>
-              <a:rPr lang="en-US" sz="1600" dirty="0"/>
+              <a:rPr lang="en-US" sz="1600" dirty="0">
+                <a:latin typeface="Titillium Web" pitchFamily="2" charset="77"/>
+              </a:rPr>
               <a:t>Runtime API</a:t>
             </a:r>
           </a:p>
@@ -3827,8 +3856,8 @@
         </p:nvSpPr>
         <p:spPr>
           <a:xfrm rot="5400000">
-            <a:off x="2721618" y="6533918"/>
-            <a:ext cx="1119537" cy="738664"/>
+            <a:off x="2688115" y="6533918"/>
+            <a:ext cx="1186543" cy="738664"/>
           </a:xfrm>
           <a:prstGeom prst="rect">
             <a:avLst/>
@@ -3843,21 +3872,27 @@
           <a:p>
             <a:pPr algn="ctr"/>
             <a:r>
-              <a:rPr lang="en-US" sz="1400" dirty="0"/>
+              <a:rPr lang="en-US" sz="1400" dirty="0">
+                <a:latin typeface="Titillium Web" pitchFamily="2" charset="77"/>
+              </a:rPr>
               <a:t>Submit</a:t>
             </a:r>
           </a:p>
           <a:p>
             <a:pPr algn="ctr"/>
             <a:r>
-              <a:rPr lang="en-US" sz="1400" dirty="0"/>
+              <a:rPr lang="en-US" sz="1400" dirty="0">
+                <a:latin typeface="Titillium Web" pitchFamily="2" charset="77"/>
+              </a:rPr>
               <a:t>Process Spec</a:t>
             </a:r>
           </a:p>
           <a:p>
             <a:pPr algn="ctr"/>
             <a:r>
-              <a:rPr lang="en-US" sz="1400" dirty="0"/>
+              <a:rPr lang="en-US" sz="1400" dirty="0">
+                <a:latin typeface="Titillium Web" pitchFamily="2" charset="77"/>
+              </a:rPr>
               <a:t>A</a:t>
             </a:r>
           </a:p>
@@ -3915,7 +3950,9 @@
           <a:p>
             <a:pPr algn="ctr"/>
             <a:r>
-              <a:rPr lang="en-US" sz="1600" dirty="0"/>
+              <a:rPr lang="en-US" sz="1600" dirty="0">
+                <a:latin typeface="Titillium Web" pitchFamily="2" charset="77"/>
+              </a:rPr>
               <a:t>Process API</a:t>
             </a:r>
           </a:p>
@@ -3973,7 +4010,9 @@
           <a:p>
             <a:pPr algn="ctr"/>
             <a:r>
-              <a:rPr lang="en-US" sz="1600" dirty="0"/>
+              <a:rPr lang="en-US" sz="1600" dirty="0">
+                <a:latin typeface="Titillium Web" pitchFamily="2" charset="77"/>
+              </a:rPr>
               <a:t>Process API</a:t>
             </a:r>
           </a:p>
@@ -4031,7 +4070,9 @@
           <a:p>
             <a:pPr algn="ctr"/>
             <a:r>
-              <a:rPr lang="en-US" sz="1600" dirty="0"/>
+              <a:rPr lang="en-US" sz="1600" dirty="0">
+                <a:latin typeface="Titillium Web" pitchFamily="2" charset="77"/>
+              </a:rPr>
               <a:t>Process API</a:t>
             </a:r>
           </a:p>
@@ -4131,7 +4172,9 @@
           <a:p>
             <a:pPr algn="ctr"/>
             <a:r>
-              <a:rPr lang="en-US" sz="1600" dirty="0"/>
+              <a:rPr lang="en-US" sz="1600" dirty="0">
+                <a:latin typeface="Titillium Web" pitchFamily="2" charset="77"/>
+              </a:rPr>
               <a:t>Edge Network</a:t>
             </a:r>
           </a:p>
@@ -4188,7 +4231,9 @@
           <a:p>
             <a:pPr algn="ctr"/>
             <a:r>
-              <a:rPr lang="en-US" sz="1600" dirty="0"/>
+              <a:rPr lang="en-US" sz="1600" dirty="0">
+                <a:latin typeface="Titillium Web" pitchFamily="2" charset="77"/>
+              </a:rPr>
               <a:t>Edge Network</a:t>
             </a:r>
           </a:p>
@@ -4208,8 +4253,8 @@
         </p:nvSpPr>
         <p:spPr>
           <a:xfrm rot="5400000">
-            <a:off x="4709310" y="6487717"/>
-            <a:ext cx="922368" cy="738664"/>
+            <a:off x="4684624" y="6487717"/>
+            <a:ext cx="971741" cy="738664"/>
           </a:xfrm>
           <a:prstGeom prst="rect">
             <a:avLst/>
@@ -4224,20 +4269,26 @@
           <a:p>
             <a:pPr algn="ctr"/>
             <a:r>
-              <a:rPr lang="en-US" sz="1400" dirty="0"/>
+              <a:rPr lang="en-US" sz="1400" dirty="0">
+                <a:latin typeface="Titillium Web" pitchFamily="2" charset="77"/>
+              </a:rPr>
               <a:t>Assign</a:t>
             </a:r>
           </a:p>
           <a:p>
             <a:pPr algn="ctr"/>
             <a:r>
-              <a:rPr lang="en-US" sz="1400" dirty="0"/>
+              <a:rPr lang="en-US" sz="1400" dirty="0">
+                <a:latin typeface="Titillium Web" pitchFamily="2" charset="77"/>
+              </a:rPr>
               <a:t>Process A </a:t>
             </a:r>
           </a:p>
           <a:p>
             <a:pPr algn="ctr"/>
-            <a:endParaRPr lang="en-US" sz="1400" dirty="0"/>
+            <a:endParaRPr lang="en-US" sz="1400" dirty="0">
+              <a:latin typeface="Titillium Web" pitchFamily="2" charset="77"/>
+            </a:endParaRPr>
           </a:p>
         </p:txBody>
       </p:sp>
@@ -4296,8 +4347,8 @@
         </p:nvSpPr>
         <p:spPr>
           <a:xfrm rot="5400000">
-            <a:off x="5543616" y="6568096"/>
-            <a:ext cx="845681" cy="523220"/>
+            <a:off x="5535088" y="6568096"/>
+            <a:ext cx="862737" cy="523220"/>
           </a:xfrm>
           <a:prstGeom prst="rect">
             <a:avLst/>
@@ -4312,14 +4363,18 @@
           <a:p>
             <a:pPr algn="ctr"/>
             <a:r>
-              <a:rPr lang="en-US" sz="1400" dirty="0"/>
+              <a:rPr lang="en-US" sz="1400" dirty="0">
+                <a:latin typeface="Titillium Web" pitchFamily="2" charset="77"/>
+              </a:rPr>
               <a:t>Add</a:t>
             </a:r>
           </a:p>
           <a:p>
             <a:pPr algn="ctr"/>
             <a:r>
-              <a:rPr lang="en-US" sz="1400" dirty="0"/>
+              <a:rPr lang="en-US" sz="1400" dirty="0">
+                <a:latin typeface="Titillium Web" pitchFamily="2" charset="77"/>
+              </a:rPr>
               <a:t>Attribute</a:t>
             </a:r>
           </a:p>
@@ -4380,8 +4435,8 @@
         </p:nvSpPr>
         <p:spPr>
           <a:xfrm rot="5400000">
-            <a:off x="6139242" y="6595440"/>
-            <a:ext cx="882293" cy="523220"/>
+            <a:off x="6088430" y="6595440"/>
+            <a:ext cx="931666" cy="523220"/>
           </a:xfrm>
           <a:prstGeom prst="rect">
             <a:avLst/>
@@ -4396,14 +4451,18 @@
           <a:p>
             <a:pPr algn="ctr"/>
             <a:r>
-              <a:rPr lang="en-US" sz="1400" dirty="0"/>
+              <a:rPr lang="en-US" sz="1400" dirty="0">
+                <a:latin typeface="Titillium Web" pitchFamily="2" charset="77"/>
+              </a:rPr>
               <a:t>Finish</a:t>
             </a:r>
           </a:p>
           <a:p>
             <a:pPr algn="ctr"/>
             <a:r>
-              <a:rPr lang="en-US" sz="1400" dirty="0"/>
+              <a:rPr lang="en-US" sz="1400" dirty="0">
+                <a:latin typeface="Titillium Web" pitchFamily="2" charset="77"/>
+              </a:rPr>
               <a:t>Process A</a:t>
             </a:r>
           </a:p>
@@ -4464,8 +4523,8 @@
         </p:nvSpPr>
         <p:spPr>
           <a:xfrm rot="5400000">
-            <a:off x="7428464" y="6422808"/>
-            <a:ext cx="882293" cy="954107"/>
+            <a:off x="7429904" y="6422808"/>
+            <a:ext cx="931666" cy="954107"/>
           </a:xfrm>
           <a:prstGeom prst="rect">
             <a:avLst/>
@@ -4479,26 +4538,34 @@
           <a:lstStyle/>
           <a:p>
             <a:pPr algn="ctr"/>
-            <a:endParaRPr lang="en-US" sz="1400" dirty="0"/>
+            <a:endParaRPr lang="en-US" sz="1400" dirty="0">
+              <a:latin typeface="Titillium Web" pitchFamily="2" charset="77"/>
+            </a:endParaRPr>
           </a:p>
           <a:p>
             <a:pPr algn="ctr"/>
             <a:r>
-              <a:rPr lang="en-US" sz="1400" dirty="0"/>
+              <a:rPr lang="en-US" sz="1400" dirty="0">
+                <a:latin typeface="Titillium Web" pitchFamily="2" charset="77"/>
+              </a:rPr>
               <a:t>Event</a:t>
             </a:r>
           </a:p>
           <a:p>
             <a:pPr algn="ctr"/>
             <a:r>
-              <a:rPr lang="en-US" sz="1400" dirty="0"/>
+              <a:rPr lang="en-US" sz="1400" dirty="0">
+                <a:latin typeface="Titillium Web" pitchFamily="2" charset="77"/>
+              </a:rPr>
               <a:t>Process A</a:t>
             </a:r>
           </a:p>
           <a:p>
             <a:pPr algn="ctr"/>
             <a:r>
-              <a:rPr lang="en-US" sz="1400" dirty="0"/>
+              <a:rPr lang="en-US" sz="1400" dirty="0">
+                <a:latin typeface="Titillium Web" pitchFamily="2" charset="77"/>
+              </a:rPr>
               <a:t>Finished</a:t>
             </a:r>
           </a:p>
@@ -4560,8 +4627,8 @@
         </p:nvSpPr>
         <p:spPr>
           <a:xfrm>
-            <a:off x="8290286" y="2447848"/>
-            <a:ext cx="1718547" cy="307777"/>
+            <a:off x="8270152" y="2447848"/>
+            <a:ext cx="1758816" cy="307777"/>
           </a:xfrm>
           <a:prstGeom prst="rect">
             <a:avLst/>
@@ -4576,7 +4643,9 @@
           <a:p>
             <a:pPr algn="ctr"/>
             <a:r>
-              <a:rPr lang="en-US" sz="1400" dirty="0"/>
+              <a:rPr lang="en-US" sz="1400" dirty="0">
+                <a:latin typeface="Titillium Web" pitchFamily="2" charset="77"/>
+              </a:rPr>
               <a:t>Add Colony Runtime </a:t>
             </a:r>
           </a:p>
@@ -4700,7 +4769,9 @@
           <a:p>
             <a:pPr algn="ctr"/>
             <a:r>
-              <a:rPr lang="en-US" sz="1400" dirty="0"/>
+              <a:rPr lang="en-US" sz="1400" dirty="0">
+                <a:latin typeface="Titillium Web" pitchFamily="2" charset="77"/>
+              </a:rPr>
               <a:t>Colony Owner</a:t>
             </a:r>
           </a:p>
@@ -4720,8 +4791,8 @@
         </p:nvSpPr>
         <p:spPr>
           <a:xfrm>
-            <a:off x="9180255" y="1969550"/>
-            <a:ext cx="1338122" cy="276999"/>
+            <a:off x="9154254" y="1969550"/>
+            <a:ext cx="1390124" cy="276999"/>
           </a:xfrm>
           <a:prstGeom prst="rect">
             <a:avLst/>
@@ -4736,7 +4807,9 @@
           <a:p>
             <a:pPr algn="ctr"/>
             <a:r>
-              <a:rPr lang="en-US" sz="1200" dirty="0"/>
+              <a:rPr lang="en-US" sz="1200" dirty="0">
+                <a:latin typeface="Titillium Web" pitchFamily="2" charset="77"/>
+              </a:rPr>
               <a:t>Colony Private Key</a:t>
             </a:r>
           </a:p>
@@ -4756,8 +4829,8 @@
         </p:nvSpPr>
         <p:spPr>
           <a:xfrm>
-            <a:off x="1760009" y="4990722"/>
-            <a:ext cx="1565621" cy="276999"/>
+            <a:off x="1526031" y="5015629"/>
+            <a:ext cx="1628972" cy="276999"/>
           </a:xfrm>
           <a:prstGeom prst="rect">
             <a:avLst/>
@@ -4772,7 +4845,9 @@
           <a:p>
             <a:pPr algn="ctr"/>
             <a:r>
-              <a:rPr lang="en-US" sz="1200" dirty="0"/>
+              <a:rPr lang="en-US" sz="1200" dirty="0">
+                <a:latin typeface="Titillium Web" pitchFamily="2" charset="77"/>
+              </a:rPr>
               <a:t>Runtime Private Key A</a:t>
             </a:r>
           </a:p>
@@ -4830,7 +4905,9 @@
           <a:p>
             <a:pPr algn="ctr"/>
             <a:r>
-              <a:rPr lang="en-US" sz="1600" dirty="0"/>
+              <a:rPr lang="en-US" sz="1600" dirty="0">
+                <a:latin typeface="Titillium Web" pitchFamily="2" charset="77"/>
+              </a:rPr>
               <a:t>Colony API</a:t>
             </a:r>
           </a:p>
@@ -4850,8 +4927,8 @@
         </p:nvSpPr>
         <p:spPr>
           <a:xfrm>
-            <a:off x="2258064" y="2450141"/>
-            <a:ext cx="1315618" cy="307777"/>
+            <a:off x="2230429" y="2450141"/>
+            <a:ext cx="1370889" cy="307777"/>
           </a:xfrm>
           <a:prstGeom prst="rect">
             <a:avLst/>
@@ -4866,7 +4943,9 @@
           <a:p>
             <a:pPr algn="ctr"/>
             <a:r>
-              <a:rPr lang="en-US" sz="1400" dirty="0"/>
+              <a:rPr lang="en-US" sz="1400" dirty="0">
+                <a:latin typeface="Titillium Web" pitchFamily="2" charset="77"/>
+              </a:rPr>
               <a:t>Register Colony</a:t>
             </a:r>
           </a:p>
@@ -4933,8 +5012,8 @@
         </p:nvSpPr>
         <p:spPr>
           <a:xfrm>
-            <a:off x="2177129" y="1333005"/>
-            <a:ext cx="1186479" cy="307777"/>
+            <a:off x="2159464" y="1333005"/>
+            <a:ext cx="1221809" cy="307777"/>
           </a:xfrm>
           <a:prstGeom prst="rect">
             <a:avLst/>
@@ -4949,7 +5028,9 @@
           <a:p>
             <a:pPr algn="ctr"/>
             <a:r>
-              <a:rPr lang="en-US" sz="1400" dirty="0"/>
+              <a:rPr lang="en-US" sz="1400" dirty="0">
+                <a:latin typeface="Titillium Web" pitchFamily="2" charset="77"/>
+              </a:rPr>
               <a:t>Server Owner</a:t>
             </a:r>
           </a:p>
@@ -4969,8 +5050,8 @@
         </p:nvSpPr>
         <p:spPr>
           <a:xfrm>
-            <a:off x="1114881" y="2011397"/>
-            <a:ext cx="1345754" cy="276999"/>
+            <a:off x="1103917" y="2011397"/>
+            <a:ext cx="1367683" cy="276999"/>
           </a:xfrm>
           <a:prstGeom prst="rect">
             <a:avLst/>
@@ -4985,7 +5066,9 @@
           <a:p>
             <a:pPr algn="ctr"/>
             <a:r>
-              <a:rPr lang="en-US" sz="1200" dirty="0"/>
+              <a:rPr lang="en-US" sz="1200" dirty="0">
+                <a:latin typeface="Titillium Web" pitchFamily="2" charset="77"/>
+              </a:rPr>
               <a:t>Server Private Key</a:t>
             </a:r>
           </a:p>
@@ -5143,8 +5226,10 @@
           <a:p>
             <a:pPr algn="ctr"/>
             <a:r>
-              <a:rPr lang="en-US" sz="1600" dirty="0"/>
-              <a:t>Kubernetes</a:t>
+              <a:rPr lang="en-US" sz="1600" dirty="0">
+                <a:latin typeface="Titillium Web" pitchFamily="2" charset="77"/>
+              </a:rPr>
+              <a:t>Colonies Worker</a:t>
             </a:r>
           </a:p>
         </p:txBody>
@@ -5200,8 +5285,10 @@
           <a:p>
             <a:pPr algn="ctr"/>
             <a:r>
-              <a:rPr lang="en-US" sz="1600" dirty="0"/>
-              <a:t>Android App</a:t>
+              <a:rPr lang="en-US" sz="1600" dirty="0">
+                <a:latin typeface="Titillium Web" pitchFamily="2" charset="77"/>
+              </a:rPr>
+              <a:t>Colonies Worker</a:t>
             </a:r>
           </a:p>
         </p:txBody>
@@ -5257,8 +5344,10 @@
           <a:p>
             <a:pPr algn="ctr"/>
             <a:r>
-              <a:rPr lang="en-US" sz="1600" dirty="0"/>
-              <a:t>IoT App</a:t>
+              <a:rPr lang="en-US" sz="1600" dirty="0">
+                <a:latin typeface="Titillium Web" pitchFamily="2" charset="77"/>
+              </a:rPr>
+              <a:t>Colonies Worker</a:t>
             </a:r>
           </a:p>
         </p:txBody>
@@ -5277,8 +5366,8 @@
         </p:nvSpPr>
         <p:spPr>
           <a:xfrm>
-            <a:off x="8278417" y="2795531"/>
-            <a:ext cx="2041777" cy="307777"/>
+            <a:off x="8252384" y="2795531"/>
+            <a:ext cx="2093843" cy="307777"/>
           </a:xfrm>
           <a:prstGeom prst="rect">
             <a:avLst/>
@@ -5293,7 +5382,9 @@
           <a:p>
             <a:pPr algn="ctr"/>
             <a:r>
-              <a:rPr lang="en-US" sz="1400" dirty="0"/>
+              <a:rPr lang="en-US" sz="1400" dirty="0">
+                <a:latin typeface="Titillium Web" pitchFamily="2" charset="77"/>
+              </a:rPr>
               <a:t>Approve Colony Runtime </a:t>
             </a:r>
           </a:p>
@@ -5400,7 +5491,9 @@
           <a:p>
             <a:pPr algn="ctr"/>
             <a:r>
-              <a:rPr lang="en-US" sz="1800" dirty="0"/>
+              <a:rPr lang="en-US" sz="1800" dirty="0">
+                <a:latin typeface="Titillium Web" pitchFamily="2" charset="77"/>
+              </a:rPr>
               <a:t>Runtime</a:t>
             </a:r>
           </a:p>
@@ -5466,7 +5559,9 @@
           <a:p>
             <a:pPr algn="ctr"/>
             <a:r>
-              <a:rPr lang="en-US" sz="1800" dirty="0"/>
+              <a:rPr lang="en-US" sz="1800" dirty="0">
+                <a:latin typeface="Titillium Web" pitchFamily="2" charset="77"/>
+              </a:rPr>
               <a:t>Runtime</a:t>
             </a:r>
           </a:p>
@@ -5532,7 +5627,9 @@
           <a:p>
             <a:pPr algn="ctr"/>
             <a:r>
-              <a:rPr lang="en-US" sz="1800" dirty="0"/>
+              <a:rPr lang="en-US" sz="1800" dirty="0">
+                <a:latin typeface="Titillium Web" pitchFamily="2" charset="77"/>
+              </a:rPr>
               <a:t>Runtime</a:t>
             </a:r>
           </a:p>
@@ -5587,7 +5684,9 @@
           <a:lstStyle/>
           <a:p>
             <a:pPr algn="ctr"/>
-            <a:endParaRPr lang="en-US" dirty="0"/>
+            <a:endParaRPr lang="en-US" dirty="0">
+              <a:latin typeface="Titillium Web" pitchFamily="2" charset="77"/>
+            </a:endParaRPr>
           </a:p>
         </p:txBody>
       </p:sp>
@@ -5640,7 +5739,9 @@
           <a:lstStyle/>
           <a:p>
             <a:pPr algn="ctr"/>
-            <a:endParaRPr lang="en-US" dirty="0"/>
+            <a:endParaRPr lang="en-US" dirty="0">
+              <a:latin typeface="Titillium Web" pitchFamily="2" charset="77"/>
+            </a:endParaRPr>
           </a:p>
         </p:txBody>
       </p:sp>
@@ -5674,9 +5775,14 @@
           <a:p>
             <a:pPr algn="ctr"/>
             <a:r>
-              <a:rPr lang="en-US" sz="1800" dirty="0"/>
-              <a:t>Colony Worker</a:t>
-            </a:r>
+              <a:rPr lang="en-US" dirty="0">
+                <a:latin typeface="Titillium Web" pitchFamily="2" charset="77"/>
+              </a:rPr>
+              <a:t>Kubernetes</a:t>
+            </a:r>
+            <a:endParaRPr lang="en-US" sz="1800" dirty="0">
+              <a:latin typeface="Titillium Web" pitchFamily="2" charset="77"/>
+            </a:endParaRPr>
           </a:p>
         </p:txBody>
       </p:sp>
@@ -5710,9 +5816,14 @@
           <a:p>
             <a:pPr algn="ctr"/>
             <a:r>
-              <a:rPr lang="en-US" sz="1800" dirty="0"/>
-              <a:t>Colony Worker</a:t>
-            </a:r>
+              <a:rPr lang="en-US" dirty="0">
+                <a:latin typeface="Titillium Web" pitchFamily="2" charset="77"/>
+              </a:rPr>
+              <a:t>IoT Device</a:t>
+            </a:r>
+            <a:endParaRPr lang="en-US" sz="1800" dirty="0">
+              <a:latin typeface="Titillium Web" pitchFamily="2" charset="77"/>
+            </a:endParaRPr>
           </a:p>
         </p:txBody>
       </p:sp>
@@ -5746,9 +5857,14 @@
           <a:p>
             <a:pPr algn="ctr"/>
             <a:r>
-              <a:rPr lang="en-US" sz="1800" dirty="0"/>
-              <a:t>Colony Worker</a:t>
-            </a:r>
+              <a:rPr lang="en-US" dirty="0">
+                <a:latin typeface="Titillium Web" pitchFamily="2" charset="77"/>
+              </a:rPr>
+              <a:t>Android App</a:t>
+            </a:r>
+            <a:endParaRPr lang="en-US" sz="1800" dirty="0">
+              <a:latin typeface="Titillium Web" pitchFamily="2" charset="77"/>
+            </a:endParaRPr>
           </a:p>
         </p:txBody>
       </p:sp>
@@ -5756,6 +5872,82 @@
     <p:extLst>
       <p:ext uri="{BB962C8B-B14F-4D97-AF65-F5344CB8AC3E}">
         <p14:creationId xmlns:p14="http://schemas.microsoft.com/office/powerpoint/2010/main" val="4074230781"/>
+      </p:ext>
+    </p:extLst>
+  </p:cSld>
+  <p:clrMapOvr>
+    <a:masterClrMapping/>
+  </p:clrMapOvr>
+</p:sld>
+</file>
+
+<file path=ppt/slides/slide2.xml><?xml version="1.0" encoding="utf-8"?>
+<p:sld xmlns:a="http://schemas.openxmlformats.org/drawingml/2006/main" xmlns:r="http://schemas.openxmlformats.org/officeDocument/2006/relationships" xmlns:p="http://schemas.openxmlformats.org/presentationml/2006/main">
+  <p:cSld>
+    <p:spTree>
+      <p:nvGrpSpPr>
+        <p:cNvPr id="1" name=""/>
+        <p:cNvGrpSpPr/>
+        <p:nvPr/>
+      </p:nvGrpSpPr>
+      <p:grpSpPr>
+        <a:xfrm>
+          <a:off x="0" y="0"/>
+          <a:ext cx="0" cy="0"/>
+          <a:chOff x="0" y="0"/>
+          <a:chExt cx="0" cy="0"/>
+        </a:xfrm>
+      </p:grpSpPr>
+      <p:sp>
+        <p:nvSpPr>
+          <p:cNvPr id="4" name="Hexagon 3">
+            <a:extLst>
+              <a:ext uri="{FF2B5EF4-FFF2-40B4-BE49-F238E27FC236}">
+                <a16:creationId xmlns:a16="http://schemas.microsoft.com/office/drawing/2014/main" id="{1128B493-36B6-974C-9E49-0BCF1D7EEE0F}"/>
+              </a:ext>
+            </a:extLst>
+          </p:cNvPr>
+          <p:cNvSpPr/>
+          <p:nvPr/>
+        </p:nvSpPr>
+        <p:spPr>
+          <a:xfrm rot="5400000">
+            <a:off x="457199" y="496387"/>
+            <a:ext cx="5584373" cy="5754191"/>
+          </a:xfrm>
+          <a:prstGeom prst="hexagon">
+            <a:avLst/>
+          </a:prstGeom>
+        </p:spPr>
+        <p:style>
+          <a:lnRef idx="2">
+            <a:schemeClr val="accent1">
+              <a:shade val="50000"/>
+            </a:schemeClr>
+          </a:lnRef>
+          <a:fillRef idx="1">
+            <a:schemeClr val="accent1"/>
+          </a:fillRef>
+          <a:effectRef idx="0">
+            <a:schemeClr val="accent1"/>
+          </a:effectRef>
+          <a:fontRef idx="minor">
+            <a:schemeClr val="lt1"/>
+          </a:fontRef>
+        </p:style>
+        <p:txBody>
+          <a:bodyPr rtlCol="0" anchor="ctr"/>
+          <a:lstStyle/>
+          <a:p>
+            <a:pPr algn="ctr"/>
+            <a:endParaRPr lang="en-SE"/>
+          </a:p>
+        </p:txBody>
+      </p:sp>
+    </p:spTree>
+    <p:extLst>
+      <p:ext uri="{BB962C8B-B14F-4D97-AF65-F5344CB8AC3E}">
+        <p14:creationId xmlns:p14="http://schemas.microsoft.com/office/powerpoint/2010/main" val="532865272"/>
       </p:ext>
     </p:extLst>
   </p:cSld>

--- a/docs/images/ColoniesArch.pptx
+++ b/docs/images/ColoniesArch.pptx
@@ -683,7 +683,7 @@
           <a:p>
             <a:fld id="{B79BB705-F904-8E46-BC0B-BBFDED0D0282}" type="datetimeFigureOut">
               <a:rPr lang="en-US" smtClean="0"/>
-              <a:t>4/3/22</a:t>
+              <a:t>4/5/22</a:t>
             </a:fld>
             <a:endParaRPr lang="en-US"/>
           </a:p>
@@ -853,7 +853,7 @@
           <a:p>
             <a:fld id="{B79BB705-F904-8E46-BC0B-BBFDED0D0282}" type="datetimeFigureOut">
               <a:rPr lang="en-US" smtClean="0"/>
-              <a:t>4/3/22</a:t>
+              <a:t>4/5/22</a:t>
             </a:fld>
             <a:endParaRPr lang="en-US"/>
           </a:p>
@@ -1033,7 +1033,7 @@
           <a:p>
             <a:fld id="{B79BB705-F904-8E46-BC0B-BBFDED0D0282}" type="datetimeFigureOut">
               <a:rPr lang="en-US" smtClean="0"/>
-              <a:t>4/3/22</a:t>
+              <a:t>4/5/22</a:t>
             </a:fld>
             <a:endParaRPr lang="en-US"/>
           </a:p>
@@ -1203,7 +1203,7 @@
           <a:p>
             <a:fld id="{B79BB705-F904-8E46-BC0B-BBFDED0D0282}" type="datetimeFigureOut">
               <a:rPr lang="en-US" smtClean="0"/>
-              <a:t>4/3/22</a:t>
+              <a:t>4/5/22</a:t>
             </a:fld>
             <a:endParaRPr lang="en-US"/>
           </a:p>
@@ -1447,7 +1447,7 @@
           <a:p>
             <a:fld id="{B79BB705-F904-8E46-BC0B-BBFDED0D0282}" type="datetimeFigureOut">
               <a:rPr lang="en-US" smtClean="0"/>
-              <a:t>4/3/22</a:t>
+              <a:t>4/5/22</a:t>
             </a:fld>
             <a:endParaRPr lang="en-US"/>
           </a:p>
@@ -1679,7 +1679,7 @@
           <a:p>
             <a:fld id="{B79BB705-F904-8E46-BC0B-BBFDED0D0282}" type="datetimeFigureOut">
               <a:rPr lang="en-US" smtClean="0"/>
-              <a:t>4/3/22</a:t>
+              <a:t>4/5/22</a:t>
             </a:fld>
             <a:endParaRPr lang="en-US"/>
           </a:p>
@@ -2046,7 +2046,7 @@
           <a:p>
             <a:fld id="{B79BB705-F904-8E46-BC0B-BBFDED0D0282}" type="datetimeFigureOut">
               <a:rPr lang="en-US" smtClean="0"/>
-              <a:t>4/3/22</a:t>
+              <a:t>4/5/22</a:t>
             </a:fld>
             <a:endParaRPr lang="en-US"/>
           </a:p>
@@ -2164,7 +2164,7 @@
           <a:p>
             <a:fld id="{B79BB705-F904-8E46-BC0B-BBFDED0D0282}" type="datetimeFigureOut">
               <a:rPr lang="en-US" smtClean="0"/>
-              <a:t>4/3/22</a:t>
+              <a:t>4/5/22</a:t>
             </a:fld>
             <a:endParaRPr lang="en-US"/>
           </a:p>
@@ -2259,7 +2259,7 @@
           <a:p>
             <a:fld id="{B79BB705-F904-8E46-BC0B-BBFDED0D0282}" type="datetimeFigureOut">
               <a:rPr lang="en-US" smtClean="0"/>
-              <a:t>4/3/22</a:t>
+              <a:t>4/5/22</a:t>
             </a:fld>
             <a:endParaRPr lang="en-US"/>
           </a:p>
@@ -2536,7 +2536,7 @@
           <a:p>
             <a:fld id="{B79BB705-F904-8E46-BC0B-BBFDED0D0282}" type="datetimeFigureOut">
               <a:rPr lang="en-US" smtClean="0"/>
-              <a:t>4/3/22</a:t>
+              <a:t>4/5/22</a:t>
             </a:fld>
             <a:endParaRPr lang="en-US"/>
           </a:p>
@@ -2793,7 +2793,7 @@
           <a:p>
             <a:fld id="{B79BB705-F904-8E46-BC0B-BBFDED0D0282}" type="datetimeFigureOut">
               <a:rPr lang="en-US" smtClean="0"/>
-              <a:t>4/3/22</a:t>
+              <a:t>4/5/22</a:t>
             </a:fld>
             <a:endParaRPr lang="en-US"/>
           </a:p>
@@ -3006,7 +3006,7 @@
           <a:p>
             <a:fld id="{B79BB705-F904-8E46-BC0B-BBFDED0D0282}" type="datetimeFigureOut">
               <a:rPr lang="en-US" smtClean="0"/>
-              <a:t>4/3/22</a:t>
+              <a:t>4/5/22</a:t>
             </a:fld>
             <a:endParaRPr lang="en-US"/>
           </a:p>
@@ -4361,7 +4361,7 @@
             <a:avLst/>
           </a:prstGeom>
           <a:solidFill>
-            <a:srgbClr val="C9146F"/>
+            <a:srgbClr val="B58900"/>
           </a:solidFill>
           <a:ln>
             <a:noFill/>
@@ -4781,7 +4781,7 @@
             <a:avLst/>
           </a:prstGeom>
           <a:solidFill>
-            <a:srgbClr val="C9146F"/>
+            <a:srgbClr val="B58900"/>
           </a:solidFill>
           <a:ln>
             <a:noFill/>
@@ -5112,7 +5112,7 @@
             <a:avLst/>
           </a:prstGeom>
           <a:solidFill>
-            <a:srgbClr val="C9146F"/>
+            <a:srgbClr val="B58900"/>
           </a:solidFill>
           <a:ln>
             <a:noFill/>
@@ -7467,7 +7467,7 @@
             <a:avLst/>
           </a:prstGeom>
           <a:solidFill>
-            <a:srgbClr val="C9146F"/>
+            <a:srgbClr val="B58900"/>
           </a:solidFill>
           <a:ln>
             <a:noFill/>
@@ -7863,7 +7863,7 @@
             <a:avLst/>
           </a:prstGeom>
           <a:solidFill>
-            <a:srgbClr val="C9146F"/>
+            <a:srgbClr val="B58900"/>
           </a:solidFill>
           <a:ln>
             <a:noFill/>
@@ -8238,7 +8238,7 @@
             <a:avLst/>
           </a:prstGeom>
           <a:solidFill>
-            <a:srgbClr val="C9146F"/>
+            <a:srgbClr val="B58900"/>
           </a:solidFill>
           <a:ln>
             <a:noFill/>
